--- a/AI_tools/Copilot_Microsoft_in_finance/1_Excel_with_AI/2_Data_Analysis.pptx
+++ b/AI_tools/Copilot_Microsoft_in_finance/1_Excel_with_AI/2_Data_Analysis.pptx
@@ -253,7 +253,7 @@
           <a:p>
             <a:fld id="{175B9DE0-307C-44AA-9A14-2F76096277F0}" type="datetimeFigureOut">
               <a:rPr lang="en-IN" smtClean="0"/>
-              <a:t>09-10-2026</a:t>
+              <a:t>26-10-2026</a:t>
             </a:fld>
             <a:endParaRPr lang="en-IN"/>
           </a:p>
@@ -678,7 +678,7 @@
           <a:p>
             <a:fld id="{6EBA79C2-4FE3-4D0C-AFFB-D4FCE050D5EA}" type="datetimeFigureOut">
               <a:rPr lang="en-IN" smtClean="0"/>
-              <a:t>09-10-2026</a:t>
+              <a:t>26-10-2026</a:t>
             </a:fld>
             <a:endParaRPr lang="en-IN"/>
           </a:p>
@@ -915,7 +915,7 @@
           <a:p>
             <a:fld id="{6EBA79C2-4FE3-4D0C-AFFB-D4FCE050D5EA}" type="datetimeFigureOut">
               <a:rPr lang="en-IN" smtClean="0"/>
-              <a:t>09-10-2026</a:t>
+              <a:t>26-10-2026</a:t>
             </a:fld>
             <a:endParaRPr lang="en-IN"/>
           </a:p>
@@ -1125,7 +1125,7 @@
           <a:p>
             <a:fld id="{6EBA79C2-4FE3-4D0C-AFFB-D4FCE050D5EA}" type="datetimeFigureOut">
               <a:rPr lang="en-IN" smtClean="0"/>
-              <a:t>09-10-2026</a:t>
+              <a:t>26-10-2026</a:t>
             </a:fld>
             <a:endParaRPr lang="en-IN"/>
           </a:p>
@@ -1333,7 +1333,7 @@
           <a:p>
             <a:fld id="{6EBA79C2-4FE3-4D0C-AFFB-D4FCE050D5EA}" type="datetimeFigureOut">
               <a:rPr lang="en-IN" smtClean="0"/>
-              <a:t>09-10-2026</a:t>
+              <a:t>26-10-2026</a:t>
             </a:fld>
             <a:endParaRPr lang="en-IN"/>
           </a:p>
@@ -1646,7 +1646,7 @@
           <a:p>
             <a:fld id="{6EBA79C2-4FE3-4D0C-AFFB-D4FCE050D5EA}" type="datetimeFigureOut">
               <a:rPr lang="en-IN" smtClean="0"/>
-              <a:t>09-10-2026</a:t>
+              <a:t>26-10-2026</a:t>
             </a:fld>
             <a:endParaRPr lang="en-IN"/>
           </a:p>
@@ -1914,7 +1914,7 @@
           <a:p>
             <a:fld id="{6EBA79C2-4FE3-4D0C-AFFB-D4FCE050D5EA}" type="datetimeFigureOut">
               <a:rPr lang="en-IN" smtClean="0"/>
-              <a:t>09-10-2026</a:t>
+              <a:t>26-10-2026</a:t>
             </a:fld>
             <a:endParaRPr lang="en-IN"/>
           </a:p>
@@ -2329,7 +2329,7 @@
           <a:p>
             <a:fld id="{6EBA79C2-4FE3-4D0C-AFFB-D4FCE050D5EA}" type="datetimeFigureOut">
               <a:rPr lang="en-IN" smtClean="0"/>
-              <a:t>09-10-2026</a:t>
+              <a:t>26-10-2026</a:t>
             </a:fld>
             <a:endParaRPr lang="en-IN"/>
           </a:p>
@@ -2471,7 +2471,7 @@
           <a:p>
             <a:fld id="{6EBA79C2-4FE3-4D0C-AFFB-D4FCE050D5EA}" type="datetimeFigureOut">
               <a:rPr lang="en-IN" smtClean="0"/>
-              <a:t>09-10-2026</a:t>
+              <a:t>26-10-2026</a:t>
             </a:fld>
             <a:endParaRPr lang="en-IN"/>
           </a:p>
@@ -2584,7 +2584,7 @@
           <a:p>
             <a:fld id="{6EBA79C2-4FE3-4D0C-AFFB-D4FCE050D5EA}" type="datetimeFigureOut">
               <a:rPr lang="en-IN" smtClean="0"/>
-              <a:t>09-10-2026</a:t>
+              <a:t>26-10-2026</a:t>
             </a:fld>
             <a:endParaRPr lang="en-IN"/>
           </a:p>
@@ -2897,7 +2897,7 @@
           <a:p>
             <a:fld id="{6EBA79C2-4FE3-4D0C-AFFB-D4FCE050D5EA}" type="datetimeFigureOut">
               <a:rPr lang="en-IN" smtClean="0"/>
-              <a:t>09-10-2026</a:t>
+              <a:t>26-10-2026</a:t>
             </a:fld>
             <a:endParaRPr lang="en-IN"/>
           </a:p>
@@ -3186,7 +3186,7 @@
           <a:p>
             <a:fld id="{6EBA79C2-4FE3-4D0C-AFFB-D4FCE050D5EA}" type="datetimeFigureOut">
               <a:rPr lang="en-IN" smtClean="0"/>
-              <a:t>09-10-2026</a:t>
+              <a:t>26-10-2026</a:t>
             </a:fld>
             <a:endParaRPr lang="en-IN"/>
           </a:p>
@@ -3432,7 +3432,7 @@
           <a:p>
             <a:fld id="{6EBA79C2-4FE3-4D0C-AFFB-D4FCE050D5EA}" type="datetimeFigureOut">
               <a:rPr lang="en-IN" smtClean="0"/>
-              <a:t>09-10-2026</a:t>
+              <a:t>26-10-2026</a:t>
             </a:fld>
             <a:endParaRPr lang="en-IN"/>
           </a:p>
@@ -6060,7 +6060,7 @@
         </p:nvSpPr>
         <p:spPr>
           <a:xfrm>
-            <a:off x="2352674" y="2337739"/>
+            <a:off x="1502282" y="2237155"/>
             <a:ext cx="8985885" cy="1077218"/>
           </a:xfrm>
           <a:prstGeom prst="rect">
@@ -6556,7 +6556,7 @@
         </p:nvSpPr>
         <p:spPr>
           <a:xfrm>
-            <a:off x="-177299" y="100584"/>
+            <a:off x="-140723" y="0"/>
             <a:ext cx="2603373" cy="461665"/>
           </a:xfrm>
           <a:prstGeom prst="rect">
@@ -6600,7 +6600,7 @@
         <p:spPr>
           <a:xfrm>
             <a:off x="0" y="517856"/>
-            <a:ext cx="11865409" cy="1077218"/>
+            <a:ext cx="11865409" cy="461665"/>
           </a:xfrm>
           <a:prstGeom prst="rect">
             <a:avLst/>
@@ -6614,7 +6614,7 @@
           <a:lstStyle/>
           <a:p>
             <a:r>
-              <a:rPr lang="en-IN" sz="3200">
+              <a:rPr lang="en-IN" sz="2400">
                 <a:solidFill>
                   <a:schemeClr val="accent6">
                     <a:lumMod val="60000"/>
@@ -6933,7 +6933,7 @@
         <p:spPr>
           <a:xfrm>
             <a:off x="301752" y="192453"/>
-            <a:ext cx="11411712" cy="4893647"/>
+            <a:ext cx="11667744" cy="4893647"/>
           </a:xfrm>
           <a:prstGeom prst="rect">
             <a:avLst/>
@@ -6970,7 +6970,7 @@
           </a:p>
           <a:p>
             <a:r>
-              <a:rPr lang="en-IN" sz="2400">
+              <a:rPr lang="en-IN" sz="2400" b="1">
                 <a:solidFill>
                   <a:schemeClr val="accent6">
                     <a:lumMod val="60000"/>
@@ -6983,7 +6983,7 @@
           </a:p>
           <a:p>
             <a:r>
-              <a:rPr lang="en-IN" sz="2400" b="1">
+              <a:rPr lang="en-IN" sz="2400" i="1">
                 <a:solidFill>
                   <a:schemeClr val="accent6">
                     <a:lumMod val="60000"/>
@@ -7006,7 +7006,7 @@
           </a:p>
           <a:p>
             <a:r>
-              <a:rPr lang="en-IN" sz="2400">
+              <a:rPr lang="en-IN" sz="2400" b="1">
                 <a:solidFill>
                   <a:schemeClr val="accent6">
                     <a:lumMod val="60000"/>
@@ -7019,7 +7019,7 @@
           </a:p>
           <a:p>
             <a:r>
-              <a:rPr lang="en-IN" sz="2400" b="1">
+              <a:rPr lang="en-IN" sz="2400" i="1">
                 <a:solidFill>
                   <a:schemeClr val="accent6">
                     <a:lumMod val="60000"/>
@@ -7042,7 +7042,7 @@
           </a:p>
           <a:p>
             <a:r>
-              <a:rPr lang="en-IN" sz="2400">
+              <a:rPr lang="en-IN" sz="2400" b="1">
                 <a:solidFill>
                   <a:schemeClr val="accent6">
                     <a:lumMod val="60000"/>
@@ -7055,24 +7055,29 @@
           </a:p>
           <a:p>
             <a:r>
-              <a:rPr lang="en-IN" sz="2400" b="1">
-                <a:solidFill>
-                  <a:schemeClr val="accent6">
-                    <a:lumMod val="60000"/>
-                    <a:lumOff val="40000"/>
-                  </a:schemeClr>
-                </a:solidFill>
-              </a:rPr>
-              <a:t>“Should these outliers be removed? Explain based on the business context rather than automatically removing them.”</a:t>
-            </a:r>
-            <a:endParaRPr lang="en-IN" sz="2400">
-              <a:solidFill>
-                <a:schemeClr val="accent6">
-                  <a:lumMod val="60000"/>
-                  <a:lumOff val="40000"/>
-                </a:schemeClr>
-              </a:solidFill>
-            </a:endParaRPr>
+              <a:rPr lang="en-IN" sz="2400" i="1">
+                <a:solidFill>
+                  <a:schemeClr val="accent6">
+                    <a:lumMod val="60000"/>
+                    <a:lumOff val="40000"/>
+                  </a:schemeClr>
+                </a:solidFill>
+              </a:rPr>
+              <a:t>“ Should these outliers be removed? </a:t>
+            </a:r>
+          </a:p>
+          <a:p>
+            <a:r>
+              <a:rPr lang="en-IN" sz="2400" i="1">
+                <a:solidFill>
+                  <a:schemeClr val="accent6">
+                    <a:lumMod val="60000"/>
+                    <a:lumOff val="40000"/>
+                  </a:schemeClr>
+                </a:solidFill>
+              </a:rPr>
+              <a:t>Explain based on the business context rather than automatically removing them. ”</a:t>
+            </a:r>
           </a:p>
         </p:txBody>
       </p:sp>
